--- a/abbildungen/kap3/Interdependenzen_der_betrieblichen_Teilplaene.pptx
+++ b/abbildungen/kap3/Interdependenzen_der_betrieblichen_Teilplaene.pptx
@@ -3096,8 +3096,8 @@
         </p:nvSpPr>
         <p:spPr>
           <a:xfrm>
-            <a:off x="252000" y="36000"/>
-            <a:ext cx="1224000" cy="252000"/>
+            <a:off x="216000" y="36000"/>
+            <a:ext cx="1008000" cy="252000"/>
           </a:xfrm>
           <a:prstGeom prst="roundRect">
             <a:avLst>
@@ -3146,8 +3146,8 @@
         </p:nvSpPr>
         <p:spPr>
           <a:xfrm>
-            <a:off x="252000" y="504000"/>
-            <a:ext cx="1224000" cy="252000"/>
+            <a:off x="216000" y="504000"/>
+            <a:ext cx="1008000" cy="252000"/>
           </a:xfrm>
           <a:prstGeom prst="roundRect">
             <a:avLst>
@@ -3196,8 +3196,8 @@
         </p:nvSpPr>
         <p:spPr>
           <a:xfrm>
-            <a:off x="252000" y="1134000"/>
-            <a:ext cx="1224000" cy="252000"/>
+            <a:off x="216000" y="1134000"/>
+            <a:ext cx="1008000" cy="252000"/>
           </a:xfrm>
           <a:prstGeom prst="roundRect">
             <a:avLst>
@@ -3246,8 +3246,8 @@
         </p:nvSpPr>
         <p:spPr>
           <a:xfrm>
-            <a:off x="252000" y="1602000"/>
-            <a:ext cx="1224000" cy="252000"/>
+            <a:off x="216000" y="1602000"/>
+            <a:ext cx="1008000" cy="252000"/>
           </a:xfrm>
           <a:prstGeom prst="roundRect">
             <a:avLst>
@@ -3296,8 +3296,8 @@
         </p:nvSpPr>
         <p:spPr>
           <a:xfrm>
-            <a:off x="252000" y="2070000"/>
-            <a:ext cx="1224000" cy="252000"/>
+            <a:off x="216000" y="2070000"/>
+            <a:ext cx="1008000" cy="252000"/>
           </a:xfrm>
           <a:prstGeom prst="roundRect">
             <a:avLst>
@@ -3346,8 +3346,8 @@
         </p:nvSpPr>
         <p:spPr>
           <a:xfrm>
-            <a:off x="2664000" y="504000"/>
-            <a:ext cx="1224000" cy="252000"/>
+            <a:off x="1548000" y="504000"/>
+            <a:ext cx="1008000" cy="252000"/>
           </a:xfrm>
           <a:prstGeom prst="roundRect">
             <a:avLst>
@@ -3396,8 +3396,8 @@
         </p:nvSpPr>
         <p:spPr>
           <a:xfrm>
-            <a:off x="2664000" y="1134000"/>
-            <a:ext cx="1224000" cy="252000"/>
+            <a:off x="2844000" y="1197000"/>
+            <a:ext cx="1008000" cy="252000"/>
           </a:xfrm>
           <a:prstGeom prst="roundRect">
             <a:avLst>
@@ -3440,13 +3440,13 @@
       </p:sp>
       <p:sp>
         <p:nvSpPr>
-          <p:cNvPr id="9" name="24.0"/>
+          <p:cNvPr id="9" name="20.0"/>
           <p:cNvSpPr/>
           <p:nvPr/>
         </p:nvSpPr>
         <p:spPr>
           <a:xfrm>
-            <a:off x="864000" y="288000"/>
+            <a:off x="720000" y="288000"/>
             <a:ext cx="0" cy="216000"/>
           </a:xfrm>
           <a:custGeom>
@@ -3486,13 +3486,13 @@
       </p:sp>
       <p:sp>
         <p:nvSpPr>
-          <p:cNvPr id="10" name="24.0"/>
+          <p:cNvPr id="10" name="20.0"/>
           <p:cNvSpPr/>
           <p:nvPr/>
         </p:nvSpPr>
         <p:spPr>
           <a:xfrm>
-            <a:off x="864000" y="1386000"/>
+            <a:off x="720000" y="1386000"/>
             <a:ext cx="0" cy="216000"/>
           </a:xfrm>
           <a:custGeom>
@@ -3532,13 +3532,13 @@
       </p:sp>
       <p:sp>
         <p:nvSpPr>
-          <p:cNvPr id="11" name="24.0"/>
+          <p:cNvPr id="11" name="20.0"/>
           <p:cNvSpPr/>
           <p:nvPr/>
         </p:nvSpPr>
         <p:spPr>
           <a:xfrm>
-            <a:off x="864000" y="1854000"/>
+            <a:off x="720000" y="1854000"/>
             <a:ext cx="0" cy="216000"/>
           </a:xfrm>
           <a:custGeom>
@@ -3578,14 +3578,14 @@
       </p:sp>
       <p:sp>
         <p:nvSpPr>
-          <p:cNvPr id="12" name="Ergebnis-Bilanz"/>
+          <p:cNvPr id="12" name="Absatz-Ressourcen"/>
           <p:cNvSpPr/>
           <p:nvPr/>
         </p:nvSpPr>
         <p:spPr>
           <a:xfrm>
-            <a:off x="3276000" y="756000"/>
-            <a:ext cx="0" cy="378000"/>
+            <a:off x="90000" y="162000"/>
+            <a:ext cx="126000" cy="1098000"/>
           </a:xfrm>
           <a:custGeom>
             <a:avLst/>
@@ -3594,55 +3594,9 @@
             <a:cxnLst/>
             <a:rect l="l" t="t" r="r" b="b"/>
             <a:pathLst>
-              <a:path w="0" h="378000">
+              <a:path w="126000" h="1098000">
                 <a:moveTo>
-                  <a:pt x="0" y="0"/>
-                </a:moveTo>
-                <a:lnTo>
-                  <a:pt x="0" y="378000"/>
-                </a:lnTo>
-              </a:path>
-            </a:pathLst>
-          </a:custGeom>
-          <a:noFill/>
-          <a:ln w="9525">
-            <a:solidFill>
-              <a:srgbClr val="3A3F44"/>
-            </a:solidFill>
-            <a:round/>
-            <a:headEnd type="triangle" w="med" len="med"/>
-            <a:tailEnd type="triangle" w="med" len="med"/>
-          </a:ln>
-        </p:spPr>
-        <p:txBody>
-          <a:bodyPr rtlCol="0" anchor="ctr"/>
-          <a:lstStyle/>
-          <a:p>
-            <a:pPr algn="ctr"/>
-          </a:p>
-        </p:txBody>
-      </p:sp>
-      <p:sp>
-        <p:nvSpPr>
-          <p:cNvPr id="13" name="Absatz-Ressourcen"/>
-          <p:cNvSpPr/>
-          <p:nvPr/>
-        </p:nvSpPr>
-        <p:spPr>
-          <a:xfrm>
-            <a:off x="90000" y="162000"/>
-            <a:ext cx="162000" cy="1098000"/>
-          </a:xfrm>
-          <a:custGeom>
-            <a:avLst/>
-            <a:gdLst/>
-            <a:ahLst/>
-            <a:cxnLst/>
-            <a:rect l="l" t="t" r="r" b="b"/>
-            <a:pathLst>
-              <a:path w="162000" h="1098000">
-                <a:moveTo>
-                  <a:pt x="162000" y="0"/>
+                  <a:pt x="126000" y="0"/>
                 </a:moveTo>
                 <a:lnTo>
                   <a:pt x="0" y="0"/>
@@ -3651,7 +3605,7 @@
                   <a:pt x="0" y="1098000"/>
                 </a:lnTo>
                 <a:lnTo>
-                  <a:pt x="162000" y="1098000"/>
+                  <a:pt x="126000" y="1098000"/>
                 </a:lnTo>
               </a:path>
             </a:pathLst>
@@ -3675,14 +3629,14 @@
       </p:sp>
       <p:sp>
         <p:nvSpPr>
-          <p:cNvPr id="14" name="Umsatz-Ergebnis"/>
+          <p:cNvPr id="13" name="Umsatz-Ergebnis"/>
           <p:cNvSpPr/>
           <p:nvPr/>
         </p:nvSpPr>
         <p:spPr>
           <a:xfrm>
-            <a:off x="1476000" y="630000"/>
-            <a:ext cx="1188000" cy="0"/>
+            <a:off x="1224000" y="630000"/>
+            <a:ext cx="324000" cy="0"/>
           </a:xfrm>
           <a:custGeom>
             <a:avLst/>
@@ -3691,12 +3645,12 @@
             <a:cxnLst/>
             <a:rect l="l" t="t" r="r" b="b"/>
             <a:pathLst>
-              <a:path w="1188000" h="0">
+              <a:path w="324000" h="0">
                 <a:moveTo>
                   <a:pt x="0" y="0"/>
                 </a:moveTo>
                 <a:lnTo>
-                  <a:pt x="1188000" y="0"/>
+                  <a:pt x="324000" y="0"/>
                 </a:lnTo>
               </a:path>
             </a:pathLst>
@@ -3720,14 +3674,14 @@
       </p:sp>
       <p:sp>
         <p:nvSpPr>
-          <p:cNvPr id="15" name="Ressourcen-Bilanz"/>
+          <p:cNvPr id="14" name="Ressourcen-Ergebnis"/>
           <p:cNvSpPr/>
           <p:nvPr/>
         </p:nvSpPr>
         <p:spPr>
           <a:xfrm>
-            <a:off x="1476000" y="1260000"/>
-            <a:ext cx="1188000" cy="0"/>
+            <a:off x="1224000" y="756000"/>
+            <a:ext cx="648000" cy="441000"/>
           </a:xfrm>
           <a:custGeom>
             <a:avLst/>
@@ -3736,12 +3690,15 @@
             <a:cxnLst/>
             <a:rect l="l" t="t" r="r" b="b"/>
             <a:pathLst>
-              <a:path w="1188000" h="0">
+              <a:path w="648000" h="441000">
                 <a:moveTo>
-                  <a:pt x="0" y="0"/>
+                  <a:pt x="0" y="441000"/>
                 </a:moveTo>
                 <a:lnTo>
-                  <a:pt x="1188000" y="0"/>
+                  <a:pt x="648000" y="441000"/>
+                </a:lnTo>
+                <a:lnTo>
+                  <a:pt x="648000" y="0"/>
                 </a:lnTo>
               </a:path>
             </a:pathLst>
@@ -3765,14 +3722,14 @@
       </p:sp>
       <p:sp>
         <p:nvSpPr>
-          <p:cNvPr id="16" name="Sammelleitung"/>
+          <p:cNvPr id="15" name="Ressourcen-Bilanz"/>
           <p:cNvSpPr/>
           <p:nvPr/>
         </p:nvSpPr>
         <p:spPr>
           <a:xfrm>
-            <a:off x="2070000" y="630000"/>
-            <a:ext cx="0" cy="630000"/>
+            <a:off x="1224000" y="1323000"/>
+            <a:ext cx="1620000" cy="0"/>
           </a:xfrm>
           <a:custGeom>
             <a:avLst/>
@@ -3781,12 +3738,12 @@
             <a:cxnLst/>
             <a:rect l="l" t="t" r="r" b="b"/>
             <a:pathLst>
-              <a:path w="0" h="630000">
+              <a:path w="1620000" h="0">
                 <a:moveTo>
                   <a:pt x="0" y="0"/>
                 </a:moveTo>
                 <a:lnTo>
-                  <a:pt x="0" y="630000"/>
+                  <a:pt x="1620000" y="0"/>
                 </a:lnTo>
               </a:path>
             </a:pathLst>
@@ -3797,6 +3754,7 @@
               <a:srgbClr val="3A3F44"/>
             </a:solidFill>
             <a:round/>
+            <a:tailEnd type="triangle" w="med" len="med"/>
           </a:ln>
         </p:spPr>
         <p:txBody>
@@ -3809,72 +3767,14 @@
       </p:sp>
       <p:sp>
         <p:nvSpPr>
-          <p:cNvPr id="17" name="Knoten"/>
+          <p:cNvPr id="16" name="Kosten-Ergebnis"/>
           <p:cNvSpPr/>
           <p:nvPr/>
         </p:nvSpPr>
         <p:spPr>
           <a:xfrm>
-            <a:off x="2053800" y="613800"/>
-            <a:ext cx="32400" cy="32400"/>
-          </a:xfrm>
-          <a:prstGeom prst="ellipse">
-            <a:avLst/>
-          </a:prstGeom>
-          <a:solidFill>
-            <a:srgbClr val="3A3F44"/>
-          </a:solidFill>
-          <a:ln>
-            <a:noFill/>
-          </a:ln>
-        </p:spPr>
-        <p:txBody>
-          <a:bodyPr rtlCol="0" anchor="ctr"/>
-          <a:lstStyle/>
-          <a:p>
-            <a:pPr algn="ctr"/>
-          </a:p>
-        </p:txBody>
-      </p:sp>
-      <p:sp>
-        <p:nvSpPr>
-          <p:cNvPr id="18" name="Knoten"/>
-          <p:cNvSpPr/>
-          <p:nvPr/>
-        </p:nvSpPr>
-        <p:spPr>
-          <a:xfrm>
-            <a:off x="2053800" y="1243800"/>
-            <a:ext cx="32400" cy="32400"/>
-          </a:xfrm>
-          <a:prstGeom prst="ellipse">
-            <a:avLst/>
-          </a:prstGeom>
-          <a:solidFill>
-            <a:srgbClr val="3A3F44"/>
-          </a:solidFill>
-          <a:ln>
-            <a:noFill/>
-          </a:ln>
-        </p:spPr>
-        <p:txBody>
-          <a:bodyPr rtlCol="0" anchor="ctr"/>
-          <a:lstStyle/>
-          <a:p>
-            <a:pPr algn="ctr"/>
-          </a:p>
-        </p:txBody>
-      </p:sp>
-      <p:sp>
-        <p:nvSpPr>
-          <p:cNvPr id="19" name="Kosten-Bilanz"/>
-          <p:cNvSpPr/>
-          <p:nvPr/>
-        </p:nvSpPr>
-        <p:spPr>
-          <a:xfrm>
-            <a:off x="1476000" y="1386000"/>
-            <a:ext cx="1800000" cy="810000"/>
+            <a:off x="1224000" y="756000"/>
+            <a:ext cx="1008000" cy="1440000"/>
           </a:xfrm>
           <a:custGeom>
             <a:avLst/>
@@ -3883,15 +3783,63 @@
             <a:cxnLst/>
             <a:rect l="l" t="t" r="r" b="b"/>
             <a:pathLst>
-              <a:path w="1800000" h="810000">
+              <a:path w="1008000" h="1440000">
                 <a:moveTo>
-                  <a:pt x="0" y="810000"/>
+                  <a:pt x="0" y="1440000"/>
                 </a:moveTo>
                 <a:lnTo>
-                  <a:pt x="1800000" y="810000"/>
+                  <a:pt x="1008000" y="1440000"/>
                 </a:lnTo>
                 <a:lnTo>
-                  <a:pt x="1800000" y="0"/>
+                  <a:pt x="1008000" y="0"/>
+                </a:lnTo>
+              </a:path>
+            </a:pathLst>
+          </a:custGeom>
+          <a:noFill/>
+          <a:ln w="9525">
+            <a:solidFill>
+              <a:srgbClr val="3A3F44"/>
+            </a:solidFill>
+            <a:round/>
+            <a:tailEnd type="triangle" w="med" len="med"/>
+          </a:ln>
+        </p:spPr>
+        <p:txBody>
+          <a:bodyPr rtlCol="0" anchor="ctr"/>
+          <a:lstStyle/>
+          <a:p>
+            <a:pPr algn="ctr"/>
+          </a:p>
+        </p:txBody>
+      </p:sp>
+      <p:sp>
+        <p:nvSpPr>
+          <p:cNvPr id="17" name="Ergebnis-Bilanz"/>
+          <p:cNvSpPr/>
+          <p:nvPr/>
+        </p:nvSpPr>
+        <p:spPr>
+          <a:xfrm>
+            <a:off x="2556000" y="630000"/>
+            <a:ext cx="792000" cy="567000"/>
+          </a:xfrm>
+          <a:custGeom>
+            <a:avLst/>
+            <a:gdLst/>
+            <a:ahLst/>
+            <a:cxnLst/>
+            <a:rect l="l" t="t" r="r" b="b"/>
+            <a:pathLst>
+              <a:path w="792000" h="567000">
+                <a:moveTo>
+                  <a:pt x="0" y="0"/>
+                </a:moveTo>
+                <a:lnTo>
+                  <a:pt x="792000" y="0"/>
+                </a:lnTo>
+                <a:lnTo>
+                  <a:pt x="792000" y="567000"/>
                 </a:lnTo>
               </a:path>
             </a:pathLst>

--- a/abbildungen/kap3/Interdependenzen_der_betrieblichen_Teilplaene.pptx
+++ b/abbildungen/kap3/Interdependenzen_der_betrieblichen_Teilplaene.pptx
@@ -7,7 +7,7 @@
   <p:sldIdLst>
     <p:sldId id="256" r:id="rId7"/>
   </p:sldIdLst>
-  <p:sldSz cx="3960000" cy="2358000" type="screen4x3"/>
+  <p:sldSz cx="3816000" cy="2358000" type="screen4x3"/>
   <p:notesSz cx="6858000" cy="9144000"/>
   <p:defaultTextStyle>
     <a:defPPr>
@@ -3396,7 +3396,7 @@
         </p:nvSpPr>
         <p:spPr>
           <a:xfrm>
-            <a:off x="2844000" y="1197000"/>
+            <a:off x="2592000" y="1197000"/>
             <a:ext cx="1008000" cy="252000"/>
           </a:xfrm>
           <a:prstGeom prst="roundRect">
@@ -3681,7 +3681,7 @@
         <p:spPr>
           <a:xfrm>
             <a:off x="1224000" y="756000"/>
-            <a:ext cx="648000" cy="441000"/>
+            <a:ext cx="504000" cy="441000"/>
           </a:xfrm>
           <a:custGeom>
             <a:avLst/>
@@ -3690,15 +3690,15 @@
             <a:cxnLst/>
             <a:rect l="l" t="t" r="r" b="b"/>
             <a:pathLst>
-              <a:path w="648000" h="441000">
+              <a:path w="504000" h="441000">
                 <a:moveTo>
                   <a:pt x="0" y="441000"/>
                 </a:moveTo>
                 <a:lnTo>
-                  <a:pt x="648000" y="441000"/>
+                  <a:pt x="504000" y="441000"/>
                 </a:lnTo>
                 <a:lnTo>
-                  <a:pt x="648000" y="0"/>
+                  <a:pt x="504000" y="0"/>
                 </a:lnTo>
               </a:path>
             </a:pathLst>
@@ -3729,7 +3729,7 @@
         <p:spPr>
           <a:xfrm>
             <a:off x="1224000" y="1323000"/>
-            <a:ext cx="1620000" cy="0"/>
+            <a:ext cx="1368000" cy="0"/>
           </a:xfrm>
           <a:custGeom>
             <a:avLst/>
@@ -3738,12 +3738,12 @@
             <a:cxnLst/>
             <a:rect l="l" t="t" r="r" b="b"/>
             <a:pathLst>
-              <a:path w="1620000" h="0">
+              <a:path w="1368000" h="0">
                 <a:moveTo>
                   <a:pt x="0" y="0"/>
                 </a:moveTo>
                 <a:lnTo>
-                  <a:pt x="1620000" y="0"/>
+                  <a:pt x="1368000" y="0"/>
                 </a:lnTo>
               </a:path>
             </a:pathLst>
@@ -3774,7 +3774,7 @@
         <p:spPr>
           <a:xfrm>
             <a:off x="1224000" y="756000"/>
-            <a:ext cx="1008000" cy="1440000"/>
+            <a:ext cx="720000" cy="1440000"/>
           </a:xfrm>
           <a:custGeom>
             <a:avLst/>
@@ -3783,15 +3783,15 @@
             <a:cxnLst/>
             <a:rect l="l" t="t" r="r" b="b"/>
             <a:pathLst>
-              <a:path w="1008000" h="1440000">
+              <a:path w="720000" h="1440000">
                 <a:moveTo>
                   <a:pt x="0" y="1440000"/>
                 </a:moveTo>
                 <a:lnTo>
-                  <a:pt x="1008000" y="1440000"/>
+                  <a:pt x="720000" y="1440000"/>
                 </a:lnTo>
                 <a:lnTo>
-                  <a:pt x="1008000" y="0"/>
+                  <a:pt x="720000" y="0"/>
                 </a:lnTo>
               </a:path>
             </a:pathLst>
@@ -3822,7 +3822,7 @@
         <p:spPr>
           <a:xfrm>
             <a:off x="2556000" y="630000"/>
-            <a:ext cx="792000" cy="567000"/>
+            <a:ext cx="540000" cy="567000"/>
           </a:xfrm>
           <a:custGeom>
             <a:avLst/>
@@ -3831,15 +3831,15 @@
             <a:cxnLst/>
             <a:rect l="l" t="t" r="r" b="b"/>
             <a:pathLst>
-              <a:path w="792000" h="567000">
+              <a:path w="540000" h="567000">
                 <a:moveTo>
                   <a:pt x="0" y="0"/>
                 </a:moveTo>
                 <a:lnTo>
-                  <a:pt x="792000" y="0"/>
+                  <a:pt x="540000" y="0"/>
                 </a:lnTo>
                 <a:lnTo>
-                  <a:pt x="792000" y="567000"/>
+                  <a:pt x="540000" y="567000"/>
                 </a:lnTo>
               </a:path>
             </a:pathLst>
